--- a/Figuras.pptx
+++ b/Figuras.pptx
@@ -6,27 +6,28 @@
   </p:sldMasterIdLst>
   <p:sldIdLst>
     <p:sldId id="256" r:id="rId2"/>
-    <p:sldId id="257" r:id="rId3"/>
-    <p:sldId id="258" r:id="rId4"/>
-    <p:sldId id="259" r:id="rId5"/>
-    <p:sldId id="260" r:id="rId6"/>
-    <p:sldId id="261" r:id="rId7"/>
-    <p:sldId id="276" r:id="rId8"/>
-    <p:sldId id="277" r:id="rId9"/>
-    <p:sldId id="278" r:id="rId10"/>
-    <p:sldId id="262" r:id="rId11"/>
-    <p:sldId id="271" r:id="rId12"/>
-    <p:sldId id="272" r:id="rId13"/>
-    <p:sldId id="269" r:id="rId14"/>
-    <p:sldId id="275" r:id="rId15"/>
-    <p:sldId id="263" r:id="rId16"/>
-    <p:sldId id="264" r:id="rId17"/>
-    <p:sldId id="265" r:id="rId18"/>
-    <p:sldId id="266" r:id="rId19"/>
-    <p:sldId id="267" r:id="rId20"/>
-    <p:sldId id="268" r:id="rId21"/>
-    <p:sldId id="273" r:id="rId22"/>
-    <p:sldId id="274" r:id="rId23"/>
+    <p:sldId id="279" r:id="rId3"/>
+    <p:sldId id="257" r:id="rId4"/>
+    <p:sldId id="258" r:id="rId5"/>
+    <p:sldId id="259" r:id="rId6"/>
+    <p:sldId id="260" r:id="rId7"/>
+    <p:sldId id="261" r:id="rId8"/>
+    <p:sldId id="276" r:id="rId9"/>
+    <p:sldId id="277" r:id="rId10"/>
+    <p:sldId id="278" r:id="rId11"/>
+    <p:sldId id="262" r:id="rId12"/>
+    <p:sldId id="271" r:id="rId13"/>
+    <p:sldId id="272" r:id="rId14"/>
+    <p:sldId id="269" r:id="rId15"/>
+    <p:sldId id="275" r:id="rId16"/>
+    <p:sldId id="263" r:id="rId17"/>
+    <p:sldId id="264" r:id="rId18"/>
+    <p:sldId id="265" r:id="rId19"/>
+    <p:sldId id="266" r:id="rId20"/>
+    <p:sldId id="267" r:id="rId21"/>
+    <p:sldId id="268" r:id="rId22"/>
+    <p:sldId id="273" r:id="rId23"/>
+    <p:sldId id="274" r:id="rId24"/>
   </p:sldIdLst>
   <p:sldSz cx="12192000" cy="6858000"/>
   <p:notesSz cx="6858000" cy="9144000"/>
@@ -147,7 +148,7 @@
 <file path=ppt/revisionInfo.xml><?xml version="1.0" encoding="utf-8"?>
 <p1510:revInfo xmlns:a="http://schemas.openxmlformats.org/drawingml/2006/main" xmlns:r="http://schemas.openxmlformats.org/officeDocument/2006/relationships" xmlns:p1510="http://schemas.microsoft.com/office/powerpoint/2015/10/main">
   <p1510:revLst>
-    <p1510:client id="{F8DE12E6-66FE-4E2F-B368-D04F8C1BAA88}" v="12" dt="2025-07-22T04:12:50.845"/>
+    <p1510:client id="{F8DE12E6-66FE-4E2F-B368-D04F8C1BAA88}" v="18" dt="2025-07-22T22:48:34.943"/>
   </p1510:revLst>
 </p1510:revInfo>
 </file>
@@ -157,7 +158,7 @@
   <pc:docChgLst>
     <pc:chgData name="Felipe Carriel" userId="1edda3cd-0e6d-497b-83f2-44306f013350" providerId="ADAL" clId="{F8DE12E6-66FE-4E2F-B368-D04F8C1BAA88}"/>
     <pc:docChg chg="undo custSel addSld delSld modSld">
-      <pc:chgData name="Felipe Carriel" userId="1edda3cd-0e6d-497b-83f2-44306f013350" providerId="ADAL" clId="{F8DE12E6-66FE-4E2F-B368-D04F8C1BAA88}" dt="2025-07-22T04:12:50.845" v="126" actId="164"/>
+      <pc:chgData name="Felipe Carriel" userId="1edda3cd-0e6d-497b-83f2-44306f013350" providerId="ADAL" clId="{F8DE12E6-66FE-4E2F-B368-D04F8C1BAA88}" dt="2025-07-22T22:48:34.608" v="132" actId="14100"/>
       <pc:docMkLst>
         <pc:docMk/>
       </pc:docMkLst>
@@ -531,6 +532,53 @@
           </ac:picMkLst>
         </pc:picChg>
       </pc:sldChg>
+      <pc:sldChg chg="addSp modSp new">
+        <pc:chgData name="Felipe Carriel" userId="1edda3cd-0e6d-497b-83f2-44306f013350" providerId="ADAL" clId="{F8DE12E6-66FE-4E2F-B368-D04F8C1BAA88}" dt="2025-07-22T22:48:34.608" v="132" actId="14100"/>
+        <pc:sldMkLst>
+          <pc:docMk/>
+          <pc:sldMk cId="1914185779" sldId="279"/>
+        </pc:sldMkLst>
+        <pc:spChg chg="mod">
+          <ac:chgData name="Felipe Carriel" userId="1edda3cd-0e6d-497b-83f2-44306f013350" providerId="ADAL" clId="{F8DE12E6-66FE-4E2F-B368-D04F8C1BAA88}" dt="2025-07-22T22:48:34.608" v="132" actId="14100"/>
+          <ac:spMkLst>
+            <pc:docMk/>
+            <pc:sldMk cId="1914185779" sldId="279"/>
+            <ac:spMk id="2" creationId="{98D391C6-8C5D-6978-922B-C922936D05C6}"/>
+          </ac:spMkLst>
+        </pc:spChg>
+        <pc:spChg chg="mod">
+          <ac:chgData name="Felipe Carriel" userId="1edda3cd-0e6d-497b-83f2-44306f013350" providerId="ADAL" clId="{F8DE12E6-66FE-4E2F-B368-D04F8C1BAA88}" dt="2025-07-22T22:48:34.608" v="132" actId="14100"/>
+          <ac:spMkLst>
+            <pc:docMk/>
+            <pc:sldMk cId="1914185779" sldId="279"/>
+            <ac:spMk id="3" creationId="{063583BA-771A-7435-D1B4-3128E78A40FC}"/>
+          </ac:spMkLst>
+        </pc:spChg>
+        <pc:spChg chg="add mod">
+          <ac:chgData name="Felipe Carriel" userId="1edda3cd-0e6d-497b-83f2-44306f013350" providerId="ADAL" clId="{F8DE12E6-66FE-4E2F-B368-D04F8C1BAA88}" dt="2025-07-22T22:48:34.608" v="132" actId="14100"/>
+          <ac:spMkLst>
+            <pc:docMk/>
+            <pc:sldMk cId="1914185779" sldId="279"/>
+            <ac:spMk id="4" creationId="{DAAE59CF-5477-3E44-F9CB-FCFF70C50801}"/>
+          </ac:spMkLst>
+        </pc:spChg>
+        <pc:picChg chg="add mod">
+          <ac:chgData name="Felipe Carriel" userId="1edda3cd-0e6d-497b-83f2-44306f013350" providerId="ADAL" clId="{F8DE12E6-66FE-4E2F-B368-D04F8C1BAA88}" dt="2025-07-22T22:48:34.608" v="132" actId="14100"/>
+          <ac:picMkLst>
+            <pc:docMk/>
+            <pc:sldMk cId="1914185779" sldId="279"/>
+            <ac:picMk id="1026" creationId="{4DD20BF8-FC7D-27F2-56AC-E5484B42CEC5}"/>
+          </ac:picMkLst>
+        </pc:picChg>
+        <pc:picChg chg="add">
+          <ac:chgData name="Felipe Carriel" userId="1edda3cd-0e6d-497b-83f2-44306f013350" providerId="ADAL" clId="{F8DE12E6-66FE-4E2F-B368-D04F8C1BAA88}" dt="2025-07-22T22:48:18.495" v="128"/>
+          <ac:picMkLst>
+            <pc:docMk/>
+            <pc:sldMk cId="1914185779" sldId="279"/>
+            <ac:picMk id="1027" creationId="{4EFB18C2-48D2-BF50-EB57-67FDC3FC801F}"/>
+          </ac:picMkLst>
+        </pc:picChg>
+      </pc:sldChg>
     </pc:docChg>
   </pc:docChgLst>
 </pc:chgInfo>
@@ -685,7 +733,7 @@
           <a:p>
             <a:fld id="{53AAA7C1-6138-425C-AB39-94B155FDD4EC}" type="datetimeFigureOut">
               <a:rPr lang="es-CL" smtClean="0"/>
-              <a:t>17-07-2025</a:t>
+              <a:t>22-07-2025</a:t>
             </a:fld>
             <a:endParaRPr lang="es-CL"/>
           </a:p>
@@ -885,7 +933,7 @@
           <a:p>
             <a:fld id="{53AAA7C1-6138-425C-AB39-94B155FDD4EC}" type="datetimeFigureOut">
               <a:rPr lang="es-CL" smtClean="0"/>
-              <a:t>17-07-2025</a:t>
+              <a:t>22-07-2025</a:t>
             </a:fld>
             <a:endParaRPr lang="es-CL"/>
           </a:p>
@@ -1095,7 +1143,7 @@
           <a:p>
             <a:fld id="{53AAA7C1-6138-425C-AB39-94B155FDD4EC}" type="datetimeFigureOut">
               <a:rPr lang="es-CL" smtClean="0"/>
-              <a:t>17-07-2025</a:t>
+              <a:t>22-07-2025</a:t>
             </a:fld>
             <a:endParaRPr lang="es-CL"/>
           </a:p>
@@ -1295,7 +1343,7 @@
           <a:p>
             <a:fld id="{53AAA7C1-6138-425C-AB39-94B155FDD4EC}" type="datetimeFigureOut">
               <a:rPr lang="es-CL" smtClean="0"/>
-              <a:t>17-07-2025</a:t>
+              <a:t>22-07-2025</a:t>
             </a:fld>
             <a:endParaRPr lang="es-CL"/>
           </a:p>
@@ -1571,7 +1619,7 @@
           <a:p>
             <a:fld id="{53AAA7C1-6138-425C-AB39-94B155FDD4EC}" type="datetimeFigureOut">
               <a:rPr lang="es-CL" smtClean="0"/>
-              <a:t>17-07-2025</a:t>
+              <a:t>22-07-2025</a:t>
             </a:fld>
             <a:endParaRPr lang="es-CL"/>
           </a:p>
@@ -1839,7 +1887,7 @@
           <a:p>
             <a:fld id="{53AAA7C1-6138-425C-AB39-94B155FDD4EC}" type="datetimeFigureOut">
               <a:rPr lang="es-CL" smtClean="0"/>
-              <a:t>17-07-2025</a:t>
+              <a:t>22-07-2025</a:t>
             </a:fld>
             <a:endParaRPr lang="es-CL"/>
           </a:p>
@@ -2254,7 +2302,7 @@
           <a:p>
             <a:fld id="{53AAA7C1-6138-425C-AB39-94B155FDD4EC}" type="datetimeFigureOut">
               <a:rPr lang="es-CL" smtClean="0"/>
-              <a:t>17-07-2025</a:t>
+              <a:t>22-07-2025</a:t>
             </a:fld>
             <a:endParaRPr lang="es-CL"/>
           </a:p>
@@ -2396,7 +2444,7 @@
           <a:p>
             <a:fld id="{53AAA7C1-6138-425C-AB39-94B155FDD4EC}" type="datetimeFigureOut">
               <a:rPr lang="es-CL" smtClean="0"/>
-              <a:t>17-07-2025</a:t>
+              <a:t>22-07-2025</a:t>
             </a:fld>
             <a:endParaRPr lang="es-CL"/>
           </a:p>
@@ -2509,7 +2557,7 @@
           <a:p>
             <a:fld id="{53AAA7C1-6138-425C-AB39-94B155FDD4EC}" type="datetimeFigureOut">
               <a:rPr lang="es-CL" smtClean="0"/>
-              <a:t>17-07-2025</a:t>
+              <a:t>22-07-2025</a:t>
             </a:fld>
             <a:endParaRPr lang="es-CL"/>
           </a:p>
@@ -2822,7 +2870,7 @@
           <a:p>
             <a:fld id="{53AAA7C1-6138-425C-AB39-94B155FDD4EC}" type="datetimeFigureOut">
               <a:rPr lang="es-CL" smtClean="0"/>
-              <a:t>17-07-2025</a:t>
+              <a:t>22-07-2025</a:t>
             </a:fld>
             <a:endParaRPr lang="es-CL"/>
           </a:p>
@@ -3111,7 +3159,7 @@
           <a:p>
             <a:fld id="{53AAA7C1-6138-425C-AB39-94B155FDD4EC}" type="datetimeFigureOut">
               <a:rPr lang="es-CL" smtClean="0"/>
-              <a:t>17-07-2025</a:t>
+              <a:t>22-07-2025</a:t>
             </a:fld>
             <a:endParaRPr lang="es-CL"/>
           </a:p>
@@ -3354,7 +3402,7 @@
           <a:p>
             <a:fld id="{53AAA7C1-6138-425C-AB39-94B155FDD4EC}" type="datetimeFigureOut">
               <a:rPr lang="es-CL" smtClean="0"/>
-              <a:t>17-07-2025</a:t>
+              <a:t>22-07-2025</a:t>
             </a:fld>
             <a:endParaRPr lang="es-CL"/>
           </a:p>
@@ -3856,6 +3904,116 @@
           <p:cNvPr id="2" name="Título 1">
             <a:extLst>
               <a:ext uri="{FF2B5EF4-FFF2-40B4-BE49-F238E27FC236}">
+                <a16:creationId xmlns:a16="http://schemas.microsoft.com/office/drawing/2014/main" id="{FBA958E5-C266-43A5-8E69-D70DB2BBBD48}"/>
+              </a:ext>
+            </a:extLst>
+          </p:cNvPr>
+          <p:cNvSpPr>
+            <a:spLocks noGrp="1"/>
+          </p:cNvSpPr>
+          <p:nvPr>
+            <p:ph type="title"/>
+          </p:nvPr>
+        </p:nvSpPr>
+        <p:spPr/>
+        <p:txBody>
+          <a:bodyPr/>
+          <a:lstStyle/>
+          <a:p>
+            <a:endParaRPr lang="es-CL"/>
+          </a:p>
+        </p:txBody>
+      </p:sp>
+      <p:sp>
+        <p:nvSpPr>
+          <p:cNvPr id="3" name="Marcador de contenido 2">
+            <a:extLst>
+              <a:ext uri="{FF2B5EF4-FFF2-40B4-BE49-F238E27FC236}">
+                <a16:creationId xmlns:a16="http://schemas.microsoft.com/office/drawing/2014/main" id="{AFA6197A-109C-5B0E-B096-FD055EE9B785}"/>
+              </a:ext>
+            </a:extLst>
+          </p:cNvPr>
+          <p:cNvSpPr>
+            <a:spLocks noGrp="1"/>
+          </p:cNvSpPr>
+          <p:nvPr>
+            <p:ph idx="1"/>
+          </p:nvPr>
+        </p:nvSpPr>
+        <p:spPr/>
+        <p:txBody>
+          <a:bodyPr/>
+          <a:lstStyle/>
+          <a:p>
+            <a:endParaRPr lang="es-CL"/>
+          </a:p>
+        </p:txBody>
+      </p:sp>
+      <p:pic>
+        <p:nvPicPr>
+          <p:cNvPr id="5" name="Imagen 4">
+            <a:extLst>
+              <a:ext uri="{FF2B5EF4-FFF2-40B4-BE49-F238E27FC236}">
+                <a16:creationId xmlns:a16="http://schemas.microsoft.com/office/drawing/2014/main" id="{41EEFE95-1B8A-D02B-ED3F-31CDB160A0C2}"/>
+              </a:ext>
+            </a:extLst>
+          </p:cNvPr>
+          <p:cNvPicPr>
+            <a:picLocks noChangeAspect="1"/>
+          </p:cNvPicPr>
+          <p:nvPr/>
+        </p:nvPicPr>
+        <p:blipFill>
+          <a:blip r:embed="rId2"/>
+          <a:stretch>
+            <a:fillRect/>
+          </a:stretch>
+        </p:blipFill>
+        <p:spPr>
+          <a:xfrm>
+            <a:off x="4201429" y="0"/>
+            <a:ext cx="3789141" cy="6858000"/>
+          </a:xfrm>
+          <a:prstGeom prst="rect">
+            <a:avLst/>
+          </a:prstGeom>
+        </p:spPr>
+      </p:pic>
+    </p:spTree>
+    <p:extLst>
+      <p:ext uri="{BB962C8B-B14F-4D97-AF65-F5344CB8AC3E}">
+        <p14:creationId xmlns:p14="http://schemas.microsoft.com/office/powerpoint/2010/main" val="961881254"/>
+      </p:ext>
+    </p:extLst>
+  </p:cSld>
+  <p:clrMapOvr>
+    <a:masterClrMapping/>
+  </p:clrMapOvr>
+</p:sld>
+</file>
+
+<file path=ppt/slides/slide11.xml><?xml version="1.0" encoding="utf-8"?>
+<p:sld xmlns:a="http://schemas.openxmlformats.org/drawingml/2006/main" xmlns:r="http://schemas.openxmlformats.org/officeDocument/2006/relationships" xmlns:p="http://schemas.openxmlformats.org/presentationml/2006/main">
+  <p:cSld>
+    <p:spTree>
+      <p:nvGrpSpPr>
+        <p:cNvPr id="1" name=""/>
+        <p:cNvGrpSpPr/>
+        <p:nvPr/>
+      </p:nvGrpSpPr>
+      <p:grpSpPr>
+        <a:xfrm>
+          <a:off x="0" y="0"/>
+          <a:ext cx="0" cy="0"/>
+          <a:chOff x="0" y="0"/>
+          <a:chExt cx="0" cy="0"/>
+        </a:xfrm>
+      </p:grpSpPr>
+      <p:sp>
+        <p:nvSpPr>
+          <p:cNvPr id="2" name="Título 1">
+            <a:extLst>
+              <a:ext uri="{FF2B5EF4-FFF2-40B4-BE49-F238E27FC236}">
                 <a16:creationId xmlns:a16="http://schemas.microsoft.com/office/drawing/2014/main" id="{DFF027BB-3CBB-B502-187D-EA2712667034}"/>
               </a:ext>
             </a:extLst>
@@ -3945,7 +4103,7 @@
 </p:sld>
 </file>
 
-<file path=ppt/slides/slide11.xml><?xml version="1.0" encoding="utf-8"?>
+<file path=ppt/slides/slide12.xml><?xml version="1.0" encoding="utf-8"?>
 <p:sld xmlns:a="http://schemas.openxmlformats.org/drawingml/2006/main" xmlns:r="http://schemas.openxmlformats.org/officeDocument/2006/relationships" xmlns:p="http://schemas.openxmlformats.org/presentationml/2006/main">
   <p:cSld>
     <p:spTree>
@@ -4056,7 +4214,7 @@
 </p:sld>
 </file>
 
-<file path=ppt/slides/slide12.xml><?xml version="1.0" encoding="utf-8"?>
+<file path=ppt/slides/slide13.xml><?xml version="1.0" encoding="utf-8"?>
 <p:sld xmlns:a="http://schemas.openxmlformats.org/drawingml/2006/main" xmlns:r="http://schemas.openxmlformats.org/officeDocument/2006/relationships" xmlns:p="http://schemas.openxmlformats.org/presentationml/2006/main">
   <p:cSld>
     <p:spTree>
@@ -4167,7 +4325,7 @@
 </p:sld>
 </file>
 
-<file path=ppt/slides/slide13.xml><?xml version="1.0" encoding="utf-8"?>
+<file path=ppt/slides/slide14.xml><?xml version="1.0" encoding="utf-8"?>
 <p:sld xmlns:a="http://schemas.openxmlformats.org/drawingml/2006/main" xmlns:r="http://schemas.openxmlformats.org/officeDocument/2006/relationships" xmlns:p="http://schemas.openxmlformats.org/presentationml/2006/main">
   <p:cSld>
     <p:spTree>
@@ -4278,7 +4436,7 @@
 </p:sld>
 </file>
 
-<file path=ppt/slides/slide14.xml><?xml version="1.0" encoding="utf-8"?>
+<file path=ppt/slides/slide15.xml><?xml version="1.0" encoding="utf-8"?>
 <p:sld xmlns:a="http://schemas.openxmlformats.org/drawingml/2006/main" xmlns:r="http://schemas.openxmlformats.org/officeDocument/2006/relationships" xmlns:p="http://schemas.openxmlformats.org/presentationml/2006/main">
   <p:cSld>
     <p:spTree>
@@ -4389,7 +4547,7 @@
 </p:sld>
 </file>
 
-<file path=ppt/slides/slide15.xml><?xml version="1.0" encoding="utf-8"?>
+<file path=ppt/slides/slide16.xml><?xml version="1.0" encoding="utf-8"?>
 <p:sld xmlns:a="http://schemas.openxmlformats.org/drawingml/2006/main" xmlns:r="http://schemas.openxmlformats.org/officeDocument/2006/relationships" xmlns:p="http://schemas.openxmlformats.org/presentationml/2006/main">
   <p:cSld>
     <p:spTree>
@@ -7357,7 +7515,7 @@
 </p:sld>
 </file>
 
-<file path=ppt/slides/slide16.xml><?xml version="1.0" encoding="utf-8"?>
+<file path=ppt/slides/slide17.xml><?xml version="1.0" encoding="utf-8"?>
 <p:sld xmlns:a="http://schemas.openxmlformats.org/drawingml/2006/main" xmlns:r="http://schemas.openxmlformats.org/officeDocument/2006/relationships" xmlns:p="http://schemas.openxmlformats.org/presentationml/2006/main">
   <p:cSld>
     <p:spTree>
@@ -12568,7 +12726,7 @@
 </p:sld>
 </file>
 
-<file path=ppt/slides/slide17.xml><?xml version="1.0" encoding="utf-8"?>
+<file path=ppt/slides/slide18.xml><?xml version="1.0" encoding="utf-8"?>
 <p:sld xmlns:a="http://schemas.openxmlformats.org/drawingml/2006/main" xmlns:r="http://schemas.openxmlformats.org/officeDocument/2006/relationships" xmlns:p="http://schemas.openxmlformats.org/presentationml/2006/main">
   <p:cSld>
     <p:spTree>
@@ -12678,7 +12836,7 @@
 </p:sld>
 </file>
 
-<file path=ppt/slides/slide18.xml><?xml version="1.0" encoding="utf-8"?>
+<file path=ppt/slides/slide19.xml><?xml version="1.0" encoding="utf-8"?>
 <p:sld xmlns:a="http://schemas.openxmlformats.org/drawingml/2006/main" xmlns:r="http://schemas.openxmlformats.org/officeDocument/2006/relationships" xmlns:p="http://schemas.openxmlformats.org/presentationml/2006/main">
   <p:cSld>
     <p:spTree>
@@ -13104,7 +13262,87 @@
 </p:sld>
 </file>
 
-<file path=ppt/slides/slide19.xml><?xml version="1.0" encoding="utf-8"?>
+<file path=ppt/slides/slide2.xml><?xml version="1.0" encoding="utf-8"?>
+<p:sld xmlns:a="http://schemas.openxmlformats.org/drawingml/2006/main" xmlns:r="http://schemas.openxmlformats.org/officeDocument/2006/relationships" xmlns:p="http://schemas.openxmlformats.org/presentationml/2006/main">
+  <p:cSld>
+    <p:spTree>
+      <p:nvGrpSpPr>
+        <p:cNvPr id="1" name=""/>
+        <p:cNvGrpSpPr/>
+        <p:nvPr/>
+      </p:nvGrpSpPr>
+      <p:grpSpPr>
+        <a:xfrm>
+          <a:off x="0" y="0"/>
+          <a:ext cx="0" cy="0"/>
+          <a:chOff x="0" y="0"/>
+          <a:chExt cx="0" cy="0"/>
+        </a:xfrm>
+      </p:grpSpPr>
+      <p:sp>
+        <p:nvSpPr>
+          <p:cNvPr id="2" name="Título 1">
+            <a:extLst>
+              <a:ext uri="{FF2B5EF4-FFF2-40B4-BE49-F238E27FC236}">
+                <a16:creationId xmlns:a16="http://schemas.microsoft.com/office/drawing/2014/main" id="{98D391C6-8C5D-6978-922B-C922936D05C6}"/>
+              </a:ext>
+            </a:extLst>
+          </p:cNvPr>
+          <p:cNvSpPr>
+            <a:spLocks noGrp="1"/>
+          </p:cNvSpPr>
+          <p:nvPr>
+            <p:ph type="title"/>
+          </p:nvPr>
+        </p:nvSpPr>
+        <p:spPr/>
+        <p:txBody>
+          <a:bodyPr/>
+          <a:lstStyle/>
+          <a:p>
+            <a:endParaRPr lang="es-CL"/>
+          </a:p>
+        </p:txBody>
+      </p:sp>
+      <p:sp>
+        <p:nvSpPr>
+          <p:cNvPr id="3" name="Marcador de contenido 2">
+            <a:extLst>
+              <a:ext uri="{FF2B5EF4-FFF2-40B4-BE49-F238E27FC236}">
+                <a16:creationId xmlns:a16="http://schemas.microsoft.com/office/drawing/2014/main" id="{063583BA-771A-7435-D1B4-3128E78A40FC}"/>
+              </a:ext>
+            </a:extLst>
+          </p:cNvPr>
+          <p:cNvSpPr>
+            <a:spLocks noGrp="1"/>
+          </p:cNvSpPr>
+          <p:nvPr>
+            <p:ph idx="1"/>
+          </p:nvPr>
+        </p:nvSpPr>
+        <p:spPr/>
+        <p:txBody>
+          <a:bodyPr/>
+          <a:lstStyle/>
+          <a:p>
+            <a:endParaRPr lang="es-CL"/>
+          </a:p>
+        </p:txBody>
+      </p:sp>
+    </p:spTree>
+    <p:extLst>
+      <p:ext uri="{BB962C8B-B14F-4D97-AF65-F5344CB8AC3E}">
+        <p14:creationId xmlns:p14="http://schemas.microsoft.com/office/powerpoint/2010/main" val="1914185779"/>
+      </p:ext>
+    </p:extLst>
+  </p:cSld>
+  <p:clrMapOvr>
+    <a:masterClrMapping/>
+  </p:clrMapOvr>
+</p:sld>
+</file>
+
+<file path=ppt/slides/slide20.xml><?xml version="1.0" encoding="utf-8"?>
 <p:sld xmlns:a="http://schemas.openxmlformats.org/drawingml/2006/main" xmlns:r="http://schemas.openxmlformats.org/officeDocument/2006/relationships" xmlns:p="http://schemas.openxmlformats.org/presentationml/2006/main">
   <p:cSld>
     <p:spTree>
@@ -13188,7 +13426,291 @@
 </p:sld>
 </file>
 
-<file path=ppt/slides/slide2.xml><?xml version="1.0" encoding="utf-8"?>
+<file path=ppt/slides/slide21.xml><?xml version="1.0" encoding="utf-8"?>
+<p:sld xmlns:a="http://schemas.openxmlformats.org/drawingml/2006/main" xmlns:r="http://schemas.openxmlformats.org/officeDocument/2006/relationships" xmlns:p="http://schemas.openxmlformats.org/presentationml/2006/main">
+  <p:cSld>
+    <p:spTree>
+      <p:nvGrpSpPr>
+        <p:cNvPr id="1" name=""/>
+        <p:cNvGrpSpPr/>
+        <p:nvPr/>
+      </p:nvGrpSpPr>
+      <p:grpSpPr>
+        <a:xfrm>
+          <a:off x="0" y="0"/>
+          <a:ext cx="0" cy="0"/>
+          <a:chOff x="0" y="0"/>
+          <a:chExt cx="0" cy="0"/>
+        </a:xfrm>
+      </p:grpSpPr>
+      <p:sp>
+        <p:nvSpPr>
+          <p:cNvPr id="2" name="Título 1">
+            <a:extLst>
+              <a:ext uri="{FF2B5EF4-FFF2-40B4-BE49-F238E27FC236}">
+                <a16:creationId xmlns:a16="http://schemas.microsoft.com/office/drawing/2014/main" id="{F912A4B0-F80C-814B-AD20-FCD37AEC0789}"/>
+              </a:ext>
+            </a:extLst>
+          </p:cNvPr>
+          <p:cNvSpPr>
+            <a:spLocks noGrp="1"/>
+          </p:cNvSpPr>
+          <p:nvPr>
+            <p:ph type="title"/>
+          </p:nvPr>
+        </p:nvSpPr>
+        <p:spPr/>
+        <p:txBody>
+          <a:bodyPr/>
+          <a:lstStyle/>
+          <a:p>
+            <a:endParaRPr lang="es-CL"/>
+          </a:p>
+        </p:txBody>
+      </p:sp>
+      <p:pic>
+        <p:nvPicPr>
+          <p:cNvPr id="8" name="Marcador de contenido 7">
+            <a:extLst>
+              <a:ext uri="{FF2B5EF4-FFF2-40B4-BE49-F238E27FC236}">
+                <a16:creationId xmlns:a16="http://schemas.microsoft.com/office/drawing/2014/main" id="{A9EF4F9F-187B-1C90-AB07-2A5BDA1A380A}"/>
+              </a:ext>
+            </a:extLst>
+          </p:cNvPr>
+          <p:cNvPicPr>
+            <a:picLocks noGrp="1" noChangeAspect="1"/>
+          </p:cNvPicPr>
+          <p:nvPr>
+            <p:ph idx="1"/>
+          </p:nvPr>
+        </p:nvPicPr>
+        <p:blipFill>
+          <a:blip r:embed="rId2"/>
+          <a:stretch>
+            <a:fillRect/>
+          </a:stretch>
+        </p:blipFill>
+        <p:spPr>
+          <a:xfrm>
+            <a:off x="3233057" y="3119551"/>
+            <a:ext cx="5725886" cy="1763486"/>
+          </a:xfrm>
+          <a:prstGeom prst="rect">
+            <a:avLst/>
+          </a:prstGeom>
+        </p:spPr>
+      </p:pic>
+    </p:spTree>
+    <p:extLst>
+      <p:ext uri="{BB962C8B-B14F-4D97-AF65-F5344CB8AC3E}">
+        <p14:creationId xmlns:p14="http://schemas.microsoft.com/office/powerpoint/2010/main" val="3299723203"/>
+      </p:ext>
+    </p:extLst>
+  </p:cSld>
+  <p:clrMapOvr>
+    <a:masterClrMapping/>
+  </p:clrMapOvr>
+</p:sld>
+</file>
+
+<file path=ppt/slides/slide22.xml><?xml version="1.0" encoding="utf-8"?>
+<p:sld xmlns:a="http://schemas.openxmlformats.org/drawingml/2006/main" xmlns:r="http://schemas.openxmlformats.org/officeDocument/2006/relationships" xmlns:p="http://schemas.openxmlformats.org/presentationml/2006/main">
+  <p:cSld>
+    <p:spTree>
+      <p:nvGrpSpPr>
+        <p:cNvPr id="1" name=""/>
+        <p:cNvGrpSpPr/>
+        <p:nvPr/>
+      </p:nvGrpSpPr>
+      <p:grpSpPr>
+        <a:xfrm>
+          <a:off x="0" y="0"/>
+          <a:ext cx="0" cy="0"/>
+          <a:chOff x="0" y="0"/>
+          <a:chExt cx="0" cy="0"/>
+        </a:xfrm>
+      </p:grpSpPr>
+      <p:sp>
+        <p:nvSpPr>
+          <p:cNvPr id="2" name="Título 1">
+            <a:extLst>
+              <a:ext uri="{FF2B5EF4-FFF2-40B4-BE49-F238E27FC236}">
+                <a16:creationId xmlns:a16="http://schemas.microsoft.com/office/drawing/2014/main" id="{BFE508CC-C982-776C-914B-3FE909EE849D}"/>
+              </a:ext>
+            </a:extLst>
+          </p:cNvPr>
+          <p:cNvSpPr>
+            <a:spLocks noGrp="1"/>
+          </p:cNvSpPr>
+          <p:nvPr>
+            <p:ph type="title"/>
+          </p:nvPr>
+        </p:nvSpPr>
+        <p:spPr/>
+        <p:txBody>
+          <a:bodyPr/>
+          <a:lstStyle/>
+          <a:p>
+            <a:endParaRPr lang="es-CL"/>
+          </a:p>
+        </p:txBody>
+      </p:sp>
+      <p:sp>
+        <p:nvSpPr>
+          <p:cNvPr id="3" name="Marcador de contenido 2">
+            <a:extLst>
+              <a:ext uri="{FF2B5EF4-FFF2-40B4-BE49-F238E27FC236}">
+                <a16:creationId xmlns:a16="http://schemas.microsoft.com/office/drawing/2014/main" id="{4CBB8046-16E9-272B-4E91-CD73ED10C28F}"/>
+              </a:ext>
+            </a:extLst>
+          </p:cNvPr>
+          <p:cNvSpPr>
+            <a:spLocks noGrp="1"/>
+          </p:cNvSpPr>
+          <p:nvPr>
+            <p:ph idx="1"/>
+          </p:nvPr>
+        </p:nvSpPr>
+        <p:spPr/>
+        <p:txBody>
+          <a:bodyPr/>
+          <a:lstStyle/>
+          <a:p>
+            <a:endParaRPr lang="es-CL" dirty="0"/>
+          </a:p>
+        </p:txBody>
+      </p:sp>
+      <p:pic>
+        <p:nvPicPr>
+          <p:cNvPr id="5" name="Imagen 4">
+            <a:extLst>
+              <a:ext uri="{FF2B5EF4-FFF2-40B4-BE49-F238E27FC236}">
+                <a16:creationId xmlns:a16="http://schemas.microsoft.com/office/drawing/2014/main" id="{9D233F74-2B04-E072-E978-2624677A3068}"/>
+              </a:ext>
+            </a:extLst>
+          </p:cNvPr>
+          <p:cNvPicPr>
+            <a:picLocks noChangeAspect="1"/>
+          </p:cNvPicPr>
+          <p:nvPr/>
+        </p:nvPicPr>
+        <p:blipFill>
+          <a:blip r:embed="rId2"/>
+          <a:stretch>
+            <a:fillRect/>
+          </a:stretch>
+        </p:blipFill>
+        <p:spPr>
+          <a:xfrm>
+            <a:off x="707572" y="792594"/>
+            <a:ext cx="10646228" cy="4666943"/>
+          </a:xfrm>
+          <a:prstGeom prst="rect">
+            <a:avLst/>
+          </a:prstGeom>
+        </p:spPr>
+      </p:pic>
+    </p:spTree>
+    <p:extLst>
+      <p:ext uri="{BB962C8B-B14F-4D97-AF65-F5344CB8AC3E}">
+        <p14:creationId xmlns:p14="http://schemas.microsoft.com/office/powerpoint/2010/main" val="308696564"/>
+      </p:ext>
+    </p:extLst>
+  </p:cSld>
+  <p:clrMapOvr>
+    <a:masterClrMapping/>
+  </p:clrMapOvr>
+</p:sld>
+</file>
+
+<file path=ppt/slides/slide23.xml><?xml version="1.0" encoding="utf-8"?>
+<p:sld xmlns:a="http://schemas.openxmlformats.org/drawingml/2006/main" xmlns:r="http://schemas.openxmlformats.org/officeDocument/2006/relationships" xmlns:p="http://schemas.openxmlformats.org/presentationml/2006/main">
+  <p:cSld>
+    <p:spTree>
+      <p:nvGrpSpPr>
+        <p:cNvPr id="1" name=""/>
+        <p:cNvGrpSpPr/>
+        <p:nvPr/>
+      </p:nvGrpSpPr>
+      <p:grpSpPr>
+        <a:xfrm>
+          <a:off x="0" y="0"/>
+          <a:ext cx="0" cy="0"/>
+          <a:chOff x="0" y="0"/>
+          <a:chExt cx="0" cy="0"/>
+        </a:xfrm>
+      </p:grpSpPr>
+      <p:sp>
+        <p:nvSpPr>
+          <p:cNvPr id="2" name="Título 1">
+            <a:extLst>
+              <a:ext uri="{FF2B5EF4-FFF2-40B4-BE49-F238E27FC236}">
+                <a16:creationId xmlns:a16="http://schemas.microsoft.com/office/drawing/2014/main" id="{0D159CBD-B654-7BEB-537D-003738164A58}"/>
+              </a:ext>
+            </a:extLst>
+          </p:cNvPr>
+          <p:cNvSpPr>
+            <a:spLocks noGrp="1"/>
+          </p:cNvSpPr>
+          <p:nvPr>
+            <p:ph type="title"/>
+          </p:nvPr>
+        </p:nvSpPr>
+        <p:spPr/>
+        <p:txBody>
+          <a:bodyPr/>
+          <a:lstStyle/>
+          <a:p>
+            <a:endParaRPr lang="es-CL"/>
+          </a:p>
+        </p:txBody>
+      </p:sp>
+      <p:pic>
+        <p:nvPicPr>
+          <p:cNvPr id="4" name="Marcador de contenido 3">
+            <a:extLst>
+              <a:ext uri="{FF2B5EF4-FFF2-40B4-BE49-F238E27FC236}">
+                <a16:creationId xmlns:a16="http://schemas.microsoft.com/office/drawing/2014/main" id="{1D4C43AD-2B2A-18CF-236A-65E4FECD9153}"/>
+              </a:ext>
+            </a:extLst>
+          </p:cNvPr>
+          <p:cNvPicPr>
+            <a:picLocks noGrp="1" noChangeAspect="1"/>
+          </p:cNvPicPr>
+          <p:nvPr>
+            <p:ph idx="1"/>
+          </p:nvPr>
+        </p:nvPicPr>
+        <p:blipFill>
+          <a:blip r:embed="rId2"/>
+          <a:stretch>
+            <a:fillRect/>
+          </a:stretch>
+        </p:blipFill>
+        <p:spPr>
+          <a:xfrm>
+            <a:off x="838200" y="1805029"/>
+            <a:ext cx="10515600" cy="3376529"/>
+          </a:xfrm>
+          <a:prstGeom prst="rect">
+            <a:avLst/>
+          </a:prstGeom>
+        </p:spPr>
+      </p:pic>
+    </p:spTree>
+    <p:extLst>
+      <p:ext uri="{BB962C8B-B14F-4D97-AF65-F5344CB8AC3E}">
+        <p14:creationId xmlns:p14="http://schemas.microsoft.com/office/powerpoint/2010/main" val="1110161739"/>
+      </p:ext>
+    </p:extLst>
+  </p:cSld>
+  <p:clrMapOvr>
+    <a:masterClrMapping/>
+  </p:clrMapOvr>
+</p:sld>
+</file>
+
+<file path=ppt/slides/slide3.xml><?xml version="1.0" encoding="utf-8"?>
 <p:sld xmlns:a="http://schemas.openxmlformats.org/drawingml/2006/main" xmlns:r="http://schemas.openxmlformats.org/officeDocument/2006/relationships" xmlns:p="http://schemas.openxmlformats.org/presentationml/2006/main">
   <p:cSld>
     <p:spTree>
@@ -13380,291 +13902,7 @@
 </p:sld>
 </file>
 
-<file path=ppt/slides/slide20.xml><?xml version="1.0" encoding="utf-8"?>
-<p:sld xmlns:a="http://schemas.openxmlformats.org/drawingml/2006/main" xmlns:r="http://schemas.openxmlformats.org/officeDocument/2006/relationships" xmlns:p="http://schemas.openxmlformats.org/presentationml/2006/main">
-  <p:cSld>
-    <p:spTree>
-      <p:nvGrpSpPr>
-        <p:cNvPr id="1" name=""/>
-        <p:cNvGrpSpPr/>
-        <p:nvPr/>
-      </p:nvGrpSpPr>
-      <p:grpSpPr>
-        <a:xfrm>
-          <a:off x="0" y="0"/>
-          <a:ext cx="0" cy="0"/>
-          <a:chOff x="0" y="0"/>
-          <a:chExt cx="0" cy="0"/>
-        </a:xfrm>
-      </p:grpSpPr>
-      <p:sp>
-        <p:nvSpPr>
-          <p:cNvPr id="2" name="Título 1">
-            <a:extLst>
-              <a:ext uri="{FF2B5EF4-FFF2-40B4-BE49-F238E27FC236}">
-                <a16:creationId xmlns:a16="http://schemas.microsoft.com/office/drawing/2014/main" id="{F912A4B0-F80C-814B-AD20-FCD37AEC0789}"/>
-              </a:ext>
-            </a:extLst>
-          </p:cNvPr>
-          <p:cNvSpPr>
-            <a:spLocks noGrp="1"/>
-          </p:cNvSpPr>
-          <p:nvPr>
-            <p:ph type="title"/>
-          </p:nvPr>
-        </p:nvSpPr>
-        <p:spPr/>
-        <p:txBody>
-          <a:bodyPr/>
-          <a:lstStyle/>
-          <a:p>
-            <a:endParaRPr lang="es-CL"/>
-          </a:p>
-        </p:txBody>
-      </p:sp>
-      <p:pic>
-        <p:nvPicPr>
-          <p:cNvPr id="8" name="Marcador de contenido 7">
-            <a:extLst>
-              <a:ext uri="{FF2B5EF4-FFF2-40B4-BE49-F238E27FC236}">
-                <a16:creationId xmlns:a16="http://schemas.microsoft.com/office/drawing/2014/main" id="{A9EF4F9F-187B-1C90-AB07-2A5BDA1A380A}"/>
-              </a:ext>
-            </a:extLst>
-          </p:cNvPr>
-          <p:cNvPicPr>
-            <a:picLocks noGrp="1" noChangeAspect="1"/>
-          </p:cNvPicPr>
-          <p:nvPr>
-            <p:ph idx="1"/>
-          </p:nvPr>
-        </p:nvPicPr>
-        <p:blipFill>
-          <a:blip r:embed="rId2"/>
-          <a:stretch>
-            <a:fillRect/>
-          </a:stretch>
-        </p:blipFill>
-        <p:spPr>
-          <a:xfrm>
-            <a:off x="3233057" y="3119551"/>
-            <a:ext cx="5725886" cy="1763486"/>
-          </a:xfrm>
-          <a:prstGeom prst="rect">
-            <a:avLst/>
-          </a:prstGeom>
-        </p:spPr>
-      </p:pic>
-    </p:spTree>
-    <p:extLst>
-      <p:ext uri="{BB962C8B-B14F-4D97-AF65-F5344CB8AC3E}">
-        <p14:creationId xmlns:p14="http://schemas.microsoft.com/office/powerpoint/2010/main" val="3299723203"/>
-      </p:ext>
-    </p:extLst>
-  </p:cSld>
-  <p:clrMapOvr>
-    <a:masterClrMapping/>
-  </p:clrMapOvr>
-</p:sld>
-</file>
-
-<file path=ppt/slides/slide21.xml><?xml version="1.0" encoding="utf-8"?>
-<p:sld xmlns:a="http://schemas.openxmlformats.org/drawingml/2006/main" xmlns:r="http://schemas.openxmlformats.org/officeDocument/2006/relationships" xmlns:p="http://schemas.openxmlformats.org/presentationml/2006/main">
-  <p:cSld>
-    <p:spTree>
-      <p:nvGrpSpPr>
-        <p:cNvPr id="1" name=""/>
-        <p:cNvGrpSpPr/>
-        <p:nvPr/>
-      </p:nvGrpSpPr>
-      <p:grpSpPr>
-        <a:xfrm>
-          <a:off x="0" y="0"/>
-          <a:ext cx="0" cy="0"/>
-          <a:chOff x="0" y="0"/>
-          <a:chExt cx="0" cy="0"/>
-        </a:xfrm>
-      </p:grpSpPr>
-      <p:sp>
-        <p:nvSpPr>
-          <p:cNvPr id="2" name="Título 1">
-            <a:extLst>
-              <a:ext uri="{FF2B5EF4-FFF2-40B4-BE49-F238E27FC236}">
-                <a16:creationId xmlns:a16="http://schemas.microsoft.com/office/drawing/2014/main" id="{BFE508CC-C982-776C-914B-3FE909EE849D}"/>
-              </a:ext>
-            </a:extLst>
-          </p:cNvPr>
-          <p:cNvSpPr>
-            <a:spLocks noGrp="1"/>
-          </p:cNvSpPr>
-          <p:nvPr>
-            <p:ph type="title"/>
-          </p:nvPr>
-        </p:nvSpPr>
-        <p:spPr/>
-        <p:txBody>
-          <a:bodyPr/>
-          <a:lstStyle/>
-          <a:p>
-            <a:endParaRPr lang="es-CL"/>
-          </a:p>
-        </p:txBody>
-      </p:sp>
-      <p:sp>
-        <p:nvSpPr>
-          <p:cNvPr id="3" name="Marcador de contenido 2">
-            <a:extLst>
-              <a:ext uri="{FF2B5EF4-FFF2-40B4-BE49-F238E27FC236}">
-                <a16:creationId xmlns:a16="http://schemas.microsoft.com/office/drawing/2014/main" id="{4CBB8046-16E9-272B-4E91-CD73ED10C28F}"/>
-              </a:ext>
-            </a:extLst>
-          </p:cNvPr>
-          <p:cNvSpPr>
-            <a:spLocks noGrp="1"/>
-          </p:cNvSpPr>
-          <p:nvPr>
-            <p:ph idx="1"/>
-          </p:nvPr>
-        </p:nvSpPr>
-        <p:spPr/>
-        <p:txBody>
-          <a:bodyPr/>
-          <a:lstStyle/>
-          <a:p>
-            <a:endParaRPr lang="es-CL" dirty="0"/>
-          </a:p>
-        </p:txBody>
-      </p:sp>
-      <p:pic>
-        <p:nvPicPr>
-          <p:cNvPr id="5" name="Imagen 4">
-            <a:extLst>
-              <a:ext uri="{FF2B5EF4-FFF2-40B4-BE49-F238E27FC236}">
-                <a16:creationId xmlns:a16="http://schemas.microsoft.com/office/drawing/2014/main" id="{9D233F74-2B04-E072-E978-2624677A3068}"/>
-              </a:ext>
-            </a:extLst>
-          </p:cNvPr>
-          <p:cNvPicPr>
-            <a:picLocks noChangeAspect="1"/>
-          </p:cNvPicPr>
-          <p:nvPr/>
-        </p:nvPicPr>
-        <p:blipFill>
-          <a:blip r:embed="rId2"/>
-          <a:stretch>
-            <a:fillRect/>
-          </a:stretch>
-        </p:blipFill>
-        <p:spPr>
-          <a:xfrm>
-            <a:off x="707572" y="792594"/>
-            <a:ext cx="10646228" cy="4666943"/>
-          </a:xfrm>
-          <a:prstGeom prst="rect">
-            <a:avLst/>
-          </a:prstGeom>
-        </p:spPr>
-      </p:pic>
-    </p:spTree>
-    <p:extLst>
-      <p:ext uri="{BB962C8B-B14F-4D97-AF65-F5344CB8AC3E}">
-        <p14:creationId xmlns:p14="http://schemas.microsoft.com/office/powerpoint/2010/main" val="308696564"/>
-      </p:ext>
-    </p:extLst>
-  </p:cSld>
-  <p:clrMapOvr>
-    <a:masterClrMapping/>
-  </p:clrMapOvr>
-</p:sld>
-</file>
-
-<file path=ppt/slides/slide22.xml><?xml version="1.0" encoding="utf-8"?>
-<p:sld xmlns:a="http://schemas.openxmlformats.org/drawingml/2006/main" xmlns:r="http://schemas.openxmlformats.org/officeDocument/2006/relationships" xmlns:p="http://schemas.openxmlformats.org/presentationml/2006/main">
-  <p:cSld>
-    <p:spTree>
-      <p:nvGrpSpPr>
-        <p:cNvPr id="1" name=""/>
-        <p:cNvGrpSpPr/>
-        <p:nvPr/>
-      </p:nvGrpSpPr>
-      <p:grpSpPr>
-        <a:xfrm>
-          <a:off x="0" y="0"/>
-          <a:ext cx="0" cy="0"/>
-          <a:chOff x="0" y="0"/>
-          <a:chExt cx="0" cy="0"/>
-        </a:xfrm>
-      </p:grpSpPr>
-      <p:sp>
-        <p:nvSpPr>
-          <p:cNvPr id="2" name="Título 1">
-            <a:extLst>
-              <a:ext uri="{FF2B5EF4-FFF2-40B4-BE49-F238E27FC236}">
-                <a16:creationId xmlns:a16="http://schemas.microsoft.com/office/drawing/2014/main" id="{0D159CBD-B654-7BEB-537D-003738164A58}"/>
-              </a:ext>
-            </a:extLst>
-          </p:cNvPr>
-          <p:cNvSpPr>
-            <a:spLocks noGrp="1"/>
-          </p:cNvSpPr>
-          <p:nvPr>
-            <p:ph type="title"/>
-          </p:nvPr>
-        </p:nvSpPr>
-        <p:spPr/>
-        <p:txBody>
-          <a:bodyPr/>
-          <a:lstStyle/>
-          <a:p>
-            <a:endParaRPr lang="es-CL"/>
-          </a:p>
-        </p:txBody>
-      </p:sp>
-      <p:pic>
-        <p:nvPicPr>
-          <p:cNvPr id="4" name="Marcador de contenido 3">
-            <a:extLst>
-              <a:ext uri="{FF2B5EF4-FFF2-40B4-BE49-F238E27FC236}">
-                <a16:creationId xmlns:a16="http://schemas.microsoft.com/office/drawing/2014/main" id="{1D4C43AD-2B2A-18CF-236A-65E4FECD9153}"/>
-              </a:ext>
-            </a:extLst>
-          </p:cNvPr>
-          <p:cNvPicPr>
-            <a:picLocks noGrp="1" noChangeAspect="1"/>
-          </p:cNvPicPr>
-          <p:nvPr>
-            <p:ph idx="1"/>
-          </p:nvPr>
-        </p:nvPicPr>
-        <p:blipFill>
-          <a:blip r:embed="rId2"/>
-          <a:stretch>
-            <a:fillRect/>
-          </a:stretch>
-        </p:blipFill>
-        <p:spPr>
-          <a:xfrm>
-            <a:off x="838200" y="1805029"/>
-            <a:ext cx="10515600" cy="3376529"/>
-          </a:xfrm>
-          <a:prstGeom prst="rect">
-            <a:avLst/>
-          </a:prstGeom>
-        </p:spPr>
-      </p:pic>
-    </p:spTree>
-    <p:extLst>
-      <p:ext uri="{BB962C8B-B14F-4D97-AF65-F5344CB8AC3E}">
-        <p14:creationId xmlns:p14="http://schemas.microsoft.com/office/powerpoint/2010/main" val="1110161739"/>
-      </p:ext>
-    </p:extLst>
-  </p:cSld>
-  <p:clrMapOvr>
-    <a:masterClrMapping/>
-  </p:clrMapOvr>
-</p:sld>
-</file>
-
-<file path=ppt/slides/slide3.xml><?xml version="1.0" encoding="utf-8"?>
+<file path=ppt/slides/slide4.xml><?xml version="1.0" encoding="utf-8"?>
 <p:sld xmlns:a="http://schemas.openxmlformats.org/drawingml/2006/main" xmlns:r="http://schemas.openxmlformats.org/officeDocument/2006/relationships" xmlns:p="http://schemas.openxmlformats.org/presentationml/2006/main">
   <p:cSld>
     <p:spTree>
@@ -13856,7 +14094,7 @@
 </p:sld>
 </file>
 
-<file path=ppt/slides/slide4.xml><?xml version="1.0" encoding="utf-8"?>
+<file path=ppt/slides/slide5.xml><?xml version="1.0" encoding="utf-8"?>
 <p:sld xmlns:a="http://schemas.openxmlformats.org/drawingml/2006/main" xmlns:r="http://schemas.openxmlformats.org/officeDocument/2006/relationships" xmlns:p="http://schemas.openxmlformats.org/presentationml/2006/main">
   <p:cSld>
     <p:spTree>
@@ -13984,7 +14222,7 @@
 </p:sld>
 </file>
 
-<file path=ppt/slides/slide5.xml><?xml version="1.0" encoding="utf-8"?>
+<file path=ppt/slides/slide6.xml><?xml version="1.0" encoding="utf-8"?>
 <p:sld xmlns:a="http://schemas.openxmlformats.org/drawingml/2006/main" xmlns:r="http://schemas.openxmlformats.org/officeDocument/2006/relationships" xmlns:p="http://schemas.openxmlformats.org/presentationml/2006/main">
   <p:cSld>
     <p:spTree>
@@ -14044,7 +14282,7 @@
 </p:sld>
 </file>
 
-<file path=ppt/slides/slide6.xml><?xml version="1.0" encoding="utf-8"?>
+<file path=ppt/slides/slide7.xml><?xml version="1.0" encoding="utf-8"?>
 <p:sld xmlns:a="http://schemas.openxmlformats.org/drawingml/2006/main" xmlns:r="http://schemas.openxmlformats.org/officeDocument/2006/relationships" xmlns:p="http://schemas.openxmlformats.org/presentationml/2006/main">
   <p:cSld>
     <p:spTree>
@@ -14104,7 +14342,7 @@
 </p:sld>
 </file>
 
-<file path=ppt/slides/slide7.xml><?xml version="1.0" encoding="utf-8"?>
+<file path=ppt/slides/slide8.xml><?xml version="1.0" encoding="utf-8"?>
 <p:sld xmlns:a="http://schemas.openxmlformats.org/drawingml/2006/main" xmlns:r="http://schemas.openxmlformats.org/officeDocument/2006/relationships" xmlns:p="http://schemas.openxmlformats.org/presentationml/2006/main">
   <p:cSld>
     <p:spTree>
@@ -14214,7 +14452,7 @@
 </p:sld>
 </file>
 
-<file path=ppt/slides/slide8.xml><?xml version="1.0" encoding="utf-8"?>
+<file path=ppt/slides/slide9.xml><?xml version="1.0" encoding="utf-8"?>
 <p:sld xmlns:a="http://schemas.openxmlformats.org/drawingml/2006/main" xmlns:r="http://schemas.openxmlformats.org/officeDocument/2006/relationships" xmlns:p="http://schemas.openxmlformats.org/presentationml/2006/main">
   <p:cSld>
     <p:spTree>
@@ -14315,116 +14553,6 @@
     <p:extLst>
       <p:ext uri="{BB962C8B-B14F-4D97-AF65-F5344CB8AC3E}">
         <p14:creationId xmlns:p14="http://schemas.microsoft.com/office/powerpoint/2010/main" val="1564157361"/>
-      </p:ext>
-    </p:extLst>
-  </p:cSld>
-  <p:clrMapOvr>
-    <a:masterClrMapping/>
-  </p:clrMapOvr>
-</p:sld>
-</file>
-
-<file path=ppt/slides/slide9.xml><?xml version="1.0" encoding="utf-8"?>
-<p:sld xmlns:a="http://schemas.openxmlformats.org/drawingml/2006/main" xmlns:r="http://schemas.openxmlformats.org/officeDocument/2006/relationships" xmlns:p="http://schemas.openxmlformats.org/presentationml/2006/main">
-  <p:cSld>
-    <p:spTree>
-      <p:nvGrpSpPr>
-        <p:cNvPr id="1" name=""/>
-        <p:cNvGrpSpPr/>
-        <p:nvPr/>
-      </p:nvGrpSpPr>
-      <p:grpSpPr>
-        <a:xfrm>
-          <a:off x="0" y="0"/>
-          <a:ext cx="0" cy="0"/>
-          <a:chOff x="0" y="0"/>
-          <a:chExt cx="0" cy="0"/>
-        </a:xfrm>
-      </p:grpSpPr>
-      <p:sp>
-        <p:nvSpPr>
-          <p:cNvPr id="2" name="Título 1">
-            <a:extLst>
-              <a:ext uri="{FF2B5EF4-FFF2-40B4-BE49-F238E27FC236}">
-                <a16:creationId xmlns:a16="http://schemas.microsoft.com/office/drawing/2014/main" id="{FBA958E5-C266-43A5-8E69-D70DB2BBBD48}"/>
-              </a:ext>
-            </a:extLst>
-          </p:cNvPr>
-          <p:cNvSpPr>
-            <a:spLocks noGrp="1"/>
-          </p:cNvSpPr>
-          <p:nvPr>
-            <p:ph type="title"/>
-          </p:nvPr>
-        </p:nvSpPr>
-        <p:spPr/>
-        <p:txBody>
-          <a:bodyPr/>
-          <a:lstStyle/>
-          <a:p>
-            <a:endParaRPr lang="es-CL"/>
-          </a:p>
-        </p:txBody>
-      </p:sp>
-      <p:sp>
-        <p:nvSpPr>
-          <p:cNvPr id="3" name="Marcador de contenido 2">
-            <a:extLst>
-              <a:ext uri="{FF2B5EF4-FFF2-40B4-BE49-F238E27FC236}">
-                <a16:creationId xmlns:a16="http://schemas.microsoft.com/office/drawing/2014/main" id="{AFA6197A-109C-5B0E-B096-FD055EE9B785}"/>
-              </a:ext>
-            </a:extLst>
-          </p:cNvPr>
-          <p:cNvSpPr>
-            <a:spLocks noGrp="1"/>
-          </p:cNvSpPr>
-          <p:nvPr>
-            <p:ph idx="1"/>
-          </p:nvPr>
-        </p:nvSpPr>
-        <p:spPr/>
-        <p:txBody>
-          <a:bodyPr/>
-          <a:lstStyle/>
-          <a:p>
-            <a:endParaRPr lang="es-CL"/>
-          </a:p>
-        </p:txBody>
-      </p:sp>
-      <p:pic>
-        <p:nvPicPr>
-          <p:cNvPr id="5" name="Imagen 4">
-            <a:extLst>
-              <a:ext uri="{FF2B5EF4-FFF2-40B4-BE49-F238E27FC236}">
-                <a16:creationId xmlns:a16="http://schemas.microsoft.com/office/drawing/2014/main" id="{41EEFE95-1B8A-D02B-ED3F-31CDB160A0C2}"/>
-              </a:ext>
-            </a:extLst>
-          </p:cNvPr>
-          <p:cNvPicPr>
-            <a:picLocks noChangeAspect="1"/>
-          </p:cNvPicPr>
-          <p:nvPr/>
-        </p:nvPicPr>
-        <p:blipFill>
-          <a:blip r:embed="rId2"/>
-          <a:stretch>
-            <a:fillRect/>
-          </a:stretch>
-        </p:blipFill>
-        <p:spPr>
-          <a:xfrm>
-            <a:off x="4201429" y="0"/>
-            <a:ext cx="3789141" cy="6858000"/>
-          </a:xfrm>
-          <a:prstGeom prst="rect">
-            <a:avLst/>
-          </a:prstGeom>
-        </p:spPr>
-      </p:pic>
-    </p:spTree>
-    <p:extLst>
-      <p:ext uri="{BB962C8B-B14F-4D97-AF65-F5344CB8AC3E}">
-        <p14:creationId xmlns:p14="http://schemas.microsoft.com/office/powerpoint/2010/main" val="961881254"/>
       </p:ext>
     </p:extLst>
   </p:cSld>
